--- a/docs/presentaciones/classes/clase-059-launch-monitoreo-y-mantenimiento-presentacion.pptx
+++ b/docs/presentaciones/classes/clase-059-launch-monitoreo-y-mantenimiento-presentacion.pptx
@@ -4955,7 +4955,7 @@
                 </a:solidFill>
                 <a:latin typeface="Segoe UI"/>
               </a:rPr>
-              <a:t>Primer bloque ejecutable del notebook.</a:t>
+              <a:t>Entrenar es la mitad: el resto es serializar, detectar data drift (PSI, KS-test), disparar retraining y comparar releases (shadow deploy). Simulamos todo de forma ejecutable. Requiere: numpy, pandas, scipy, scikit-learn, joblib, matplotlib.</a:t>
             </a:r>
           </a:p>
         </p:txBody>
@@ -5042,7 +5042,197 @@
                 </a:solidFill>
                 <a:latin typeface="Courier New"/>
               </a:rPr>
-              <a:t># Imports y configuración inicial</a:t>
+              <a:t>import numpy as np</a:t>
+            </a:r>
+          </a:p>
+          <a:p>
+            <a:pPr>
+              <a:defRPr sz="1200" b="0">
+                <a:solidFill>
+                  <a:srgbClr val="F8FAFC"/>
+                </a:solidFill>
+                <a:latin typeface="Courier New"/>
+              </a:defRPr>
+            </a:pPr>
+            <a:r>
+              <a:rPr sz="1200" b="0">
+                <a:solidFill>
+                  <a:srgbClr val="F8FAFC"/>
+                </a:solidFill>
+                <a:latin typeface="Courier New"/>
+              </a:rPr>
+              <a:t>import pandas as pd</a:t>
+            </a:r>
+          </a:p>
+          <a:p>
+            <a:pPr>
+              <a:defRPr sz="1200" b="0">
+                <a:solidFill>
+                  <a:srgbClr val="F8FAFC"/>
+                </a:solidFill>
+                <a:latin typeface="Courier New"/>
+              </a:defRPr>
+            </a:pPr>
+            <a:r>
+              <a:rPr sz="1200" b="0">
+                <a:solidFill>
+                  <a:srgbClr val="F8FAFC"/>
+                </a:solidFill>
+                <a:latin typeface="Courier New"/>
+              </a:rPr>
+              <a:t>import joblib, tempfile, os</a:t>
+            </a:r>
+          </a:p>
+          <a:p>
+            <a:pPr>
+              <a:defRPr sz="1200" b="0">
+                <a:solidFill>
+                  <a:srgbClr val="F8FAFC"/>
+                </a:solidFill>
+                <a:latin typeface="Courier New"/>
+              </a:defRPr>
+            </a:pPr>
+            <a:r>
+              <a:rPr sz="1200" b="0">
+                <a:solidFill>
+                  <a:srgbClr val="F8FAFC"/>
+                </a:solidFill>
+                <a:latin typeface="Courier New"/>
+              </a:rPr>
+              <a:t>import matplotlib.pyplot as plt</a:t>
+            </a:r>
+          </a:p>
+          <a:p>
+            <a:pPr>
+              <a:defRPr sz="1200" b="0">
+                <a:solidFill>
+                  <a:srgbClr val="F8FAFC"/>
+                </a:solidFill>
+                <a:latin typeface="Courier New"/>
+              </a:defRPr>
+            </a:pPr>
+            <a:r>
+              <a:rPr sz="1200" b="0">
+                <a:solidFill>
+                  <a:srgbClr val="F8FAFC"/>
+                </a:solidFill>
+                <a:latin typeface="Courier New"/>
+              </a:rPr>
+              <a:t>from scipy.stats import ks_2samp</a:t>
+            </a:r>
+          </a:p>
+          <a:p>
+            <a:pPr>
+              <a:defRPr sz="1200" b="0">
+                <a:solidFill>
+                  <a:srgbClr val="F8FAFC"/>
+                </a:solidFill>
+                <a:latin typeface="Courier New"/>
+              </a:defRPr>
+            </a:pPr>
+            <a:r>
+              <a:rPr sz="1200" b="0">
+                <a:solidFill>
+                  <a:srgbClr val="F8FAFC"/>
+                </a:solidFill>
+                <a:latin typeface="Courier New"/>
+              </a:rPr>
+              <a:t>from sklearn.datasets import make_classification</a:t>
+            </a:r>
+          </a:p>
+          <a:p>
+            <a:pPr>
+              <a:defRPr sz="1200" b="0">
+                <a:solidFill>
+                  <a:srgbClr val="F8FAFC"/>
+                </a:solidFill>
+                <a:latin typeface="Courier New"/>
+              </a:defRPr>
+            </a:pPr>
+            <a:r>
+              <a:rPr sz="1200" b="0">
+                <a:solidFill>
+                  <a:srgbClr val="F8FAFC"/>
+                </a:solidFill>
+                <a:latin typeface="Courier New"/>
+              </a:rPr>
+              <a:t>from sklearn.ensemble import RandomForestClassifier</a:t>
+            </a:r>
+          </a:p>
+          <a:p>
+            <a:pPr>
+              <a:defRPr sz="1200" b="0">
+                <a:solidFill>
+                  <a:srgbClr val="F8FAFC"/>
+                </a:solidFill>
+                <a:latin typeface="Courier New"/>
+              </a:defRPr>
+            </a:pPr>
+            <a:r>
+              <a:rPr sz="1200" b="0">
+                <a:solidFill>
+                  <a:srgbClr val="F8FAFC"/>
+                </a:solidFill>
+                <a:latin typeface="Courier New"/>
+              </a:rPr>
+              <a:t>from sklearn.model_selection import train_test_split</a:t>
+            </a:r>
+          </a:p>
+          <a:p>
+            <a:pPr>
+              <a:defRPr sz="1200" b="0">
+                <a:solidFill>
+                  <a:srgbClr val="F8FAFC"/>
+                </a:solidFill>
+                <a:latin typeface="Courier New"/>
+              </a:defRPr>
+            </a:pPr>
+            <a:r>
+              <a:rPr sz="1200" b="0">
+                <a:solidFill>
+                  <a:srgbClr val="F8FAFC"/>
+                </a:solidFill>
+                <a:latin typeface="Courier New"/>
+              </a:rPr>
+              <a:t> </a:t>
+            </a:r>
+          </a:p>
+          <a:p>
+            <a:pPr>
+              <a:defRPr sz="1200" b="0">
+                <a:solidFill>
+                  <a:srgbClr val="F8FAFC"/>
+                </a:solidFill>
+                <a:latin typeface="Courier New"/>
+              </a:defRPr>
+            </a:pPr>
+            <a:r>
+              <a:rPr sz="1200" b="0">
+                <a:solidFill>
+                  <a:srgbClr val="F8FAFC"/>
+                </a:solidFill>
+                <a:latin typeface="Courier New"/>
+              </a:rPr>
+              <a:t>np.random.seed(42)</a:t>
+            </a:r>
+          </a:p>
+          <a:p>
+            <a:pPr>
+              <a:defRPr sz="1200" b="0">
+                <a:solidFill>
+                  <a:srgbClr val="F8FAFC"/>
+                </a:solidFill>
+                <a:latin typeface="Courier New"/>
+              </a:defRPr>
+            </a:pPr>
+            <a:r>
+              <a:rPr sz="1200" b="0">
+                <a:solidFill>
+                  <a:srgbClr val="F8FAFC"/>
+                </a:solidFill>
+                <a:latin typeface="Courier New"/>
+              </a:rPr>
+              <a:t>rng = np.random.default_rng(42)</a:t>
             </a:r>
           </a:p>
         </p:txBody>

--- a/docs/presentaciones/classes/clase-059-launch-monitoreo-y-mantenimiento-presentacion.pptx
+++ b/docs/presentaciones/classes/clase-059-launch-monitoreo-y-mantenimiento-presentacion.pptx
@@ -3272,7 +3272,7 @@
                 </a:solidFill>
                 <a:latin typeface="Segoe UI"/>
               </a:rPr>
-              <a:t>Parte: 1 — Machine Learning Clásico · Fuente: Géron, cap. 2 § Launch, Monitor, and Maintain Your System. · Duración estimada: 60 min.</a:t>
+              <a:t>Parte: 1 — Machine Learning Clásico · Fuente: Géron, cap. 2 § Launch, Monitor, and Maintain Your System. · Duración estimada: 60 min. · Nivel: Intermedio</a:t>
             </a:r>
           </a:p>
         </p:txBody>
@@ -3581,7 +3581,7 @@
                 </a:solidFill>
                 <a:latin typeface="Segoe UI"/>
               </a:rPr>
-              <a:t>Parte: 1 — Machine Learning Clásico · Fuente: Géron, cap. 2 § Launch, Monitor, and Maintain Your System. · Duración estimada: 60 min.</a:t>
+              <a:t>Parte: 1 — Machine Learning Clásico · Fuente: Géron, cap. 2 § Launch, Monitor, and Maintain Your System. · Duración estimada: 60 min. · Nivel: Intermedio</a:t>
             </a:r>
           </a:p>
         </p:txBody>
